--- a/WerkstattPilot/06_abgabe/arbeitsgruppe3-praesentation.pptx
+++ b/WerkstattPilot/06_abgabe/arbeitsgruppe3-praesentation.pptx
@@ -3558,10 +3558,10 @@
               <a:rPr lang="de-DE" dirty="0">
                 <a:latin typeface="Arial"/>
               </a:rPr>
-              <a:t>2</a:t>
-            </a:r>
-            <a:r>
-              <a:rPr dirty="0">
+              <a:t>0</a:t>
+            </a:r>
+            <a:r>
+              <a:rPr>
                 <a:latin typeface="Arial"/>
               </a:rPr>
               <a:t>.06.2026</a:t>
@@ -5265,12 +5265,12 @@
               <a:t>arbeitsgruppe3-arbeitsprotokoll.</a:t>
             </a:r>
             <a:r>
-              <a:rPr lang="de-DE">
+              <a:rPr lang="de-DE" dirty="0" err="1">
                 <a:latin typeface="Arial"/>
               </a:rPr>
               <a:t>pdf</a:t>
             </a:r>
-            <a:endParaRPr>
+            <a:endParaRPr dirty="0">
               <a:latin typeface="Arial"/>
             </a:endParaRPr>
           </a:p>

--- a/WerkstattPilot/06_abgabe/arbeitsgruppe3-praesentation.pptx
+++ b/WerkstattPilot/06_abgabe/arbeitsgruppe3-praesentation.pptx
@@ -3561,7 +3561,7 @@
               <a:t>0</a:t>
             </a:r>
             <a:r>
-              <a:rPr>
+              <a:rPr dirty="0">
                 <a:latin typeface="Arial"/>
               </a:rPr>
               <a:t>.06.2026</a:t>
@@ -3580,7 +3580,7 @@
       </p:sp>
       <p:pic>
         <p:nvPicPr>
-          <p:cNvPr id="11" name="Picture 10" descr="aufgabe1_folie_01.png"/>
+          <p:cNvPr id="11" name="Picture 10"/>
           <p:cNvPicPr>
             <a:picLocks noChangeAspect="1"/>
           </p:cNvPicPr>
@@ -3588,14 +3588,13 @@
         </p:nvPicPr>
         <p:blipFill>
           <a:blip r:embed="rId2"/>
-          <a:stretch>
-            <a:fillRect/>
-          </a:stretch>
+          <a:srcRect/>
+          <a:stretch/>
         </p:blipFill>
         <p:spPr>
           <a:xfrm>
-            <a:off x="7620000" y="419481"/>
-            <a:ext cx="3840480" cy="2160270"/>
+            <a:off x="8208725" y="291238"/>
+            <a:ext cx="3541315" cy="2359606"/>
           </a:xfrm>
           <a:prstGeom prst="rect">
             <a:avLst/>
